--- a/sample-documents/08-contact-center-escalation-guide.pptx
+++ b/sample-documents/08-contact-center-escalation-guide.pptx
@@ -12,7 +12,7 @@
           </a:p>
           <a:p>
             <a:r>
-              <a:t>Contact Center Escalation Guide. Business area: Policy Servicing. Audience: Internal Operations. Content owner: Madi Smith. Last reviewed age days: 370. Support escalation workflow for policy servicing and unresolved customer issues.</a:t>
+              <a:t>Contact Center Escalation Guide. Business area: Policy Servicing. Audience: Internal Operations. Content owner: Content Owner 01. Language: English. Country of origin: Canada. Sentiment: Negative. Approval status: Review Required. Last reviewed age days: 370. Unresolved service cases are exceeding response targets. The guide identifies escalation checkpoints but requires updated ownership assignments.</a:t>
             </a:r>
           </a:p>
         </p:txBody>
